--- a/demo/q3-pack/q3-deck.pptx
+++ b/demo/q3-pack/q3-deck.pptx
@@ -4160,8 +4160,8 @@
         </p:nvSpPr>
         <p:spPr>
           <a:xfrm>
-            <a:off x="566928" y="475488"/>
-            <a:ext cx="11057839" cy="201168"/>
+            <a:off x="566928" y="429768"/>
+            <a:ext cx="11057839" cy="182880"/>
           </a:xfrm>
           <a:prstGeom prst="rect">
             <a:avLst/>
@@ -4593,7 +4593,7 @@
         </p:nvSpPr>
         <p:spPr>
           <a:xfrm>
-            <a:off x="7360920" y="4846320"/>
+            <a:off x="7360920" y="4663440"/>
             <a:ext cx="4261104" cy="566928"/>
           </a:xfrm>
           <a:prstGeom prst="rect">
@@ -4645,7 +4645,7 @@
         </p:nvSpPr>
         <p:spPr>
           <a:xfrm>
-            <a:off x="7360920" y="4846320"/>
+            <a:off x="7360920" y="4663440"/>
             <a:ext cx="44450" cy="566928"/>
           </a:xfrm>
           <a:prstGeom prst="rect">
@@ -4687,8 +4687,8 @@
         </p:nvSpPr>
         <p:spPr>
           <a:xfrm>
-            <a:off x="7360920" y="5486400"/>
-            <a:ext cx="4261104" cy="274320"/>
+            <a:off x="7360920" y="5285232"/>
+            <a:ext cx="4261104" cy="237744"/>
           </a:xfrm>
           <a:prstGeom prst="rect">
             <a:avLst/>
@@ -4722,8 +4722,8 @@
         </p:nvSpPr>
         <p:spPr>
           <a:xfrm>
-            <a:off x="566928" y="5797296"/>
-            <a:ext cx="11057839" cy="566928"/>
+            <a:off x="566928" y="5614416"/>
+            <a:ext cx="11057839" cy="530352"/>
           </a:xfrm>
           <a:prstGeom prst="rect">
             <a:avLst/>
@@ -4783,8 +4783,8 @@
         </p:nvSpPr>
         <p:spPr>
           <a:xfrm>
-            <a:off x="566928" y="5797296"/>
-            <a:ext cx="44450" cy="566928"/>
+            <a:off x="566928" y="5614416"/>
+            <a:ext cx="44450" cy="530352"/>
           </a:xfrm>
           <a:prstGeom prst="rect">
             <a:avLst/>
@@ -5144,8 +5144,8 @@
         </p:nvSpPr>
         <p:spPr>
           <a:xfrm>
-            <a:off x="566928" y="475488"/>
-            <a:ext cx="11057839" cy="201168"/>
+            <a:off x="566928" y="429768"/>
+            <a:ext cx="11057839" cy="182880"/>
           </a:xfrm>
           <a:prstGeom prst="rect">
             <a:avLst/>
@@ -5617,8 +5617,8 @@
         </p:nvSpPr>
         <p:spPr>
           <a:xfrm>
-            <a:off x="566928" y="475488"/>
-            <a:ext cx="11057839" cy="201168"/>
+            <a:off x="566928" y="429768"/>
+            <a:ext cx="11057839" cy="182880"/>
           </a:xfrm>
           <a:prstGeom prst="rect">
             <a:avLst/>
@@ -6074,8 +6074,8 @@
         </p:nvSpPr>
         <p:spPr>
           <a:xfrm>
-            <a:off x="566928" y="475488"/>
-            <a:ext cx="11057839" cy="201168"/>
+            <a:off x="566928" y="429768"/>
+            <a:ext cx="11057839" cy="182880"/>
           </a:xfrm>
           <a:prstGeom prst="rect">
             <a:avLst/>
@@ -6531,8 +6531,8 @@
         </p:nvSpPr>
         <p:spPr>
           <a:xfrm>
-            <a:off x="566928" y="475488"/>
-            <a:ext cx="11057839" cy="201168"/>
+            <a:off x="566928" y="429768"/>
+            <a:ext cx="11057839" cy="182880"/>
           </a:xfrm>
           <a:prstGeom prst="rect">
             <a:avLst/>
@@ -6988,8 +6988,8 @@
         </p:nvSpPr>
         <p:spPr>
           <a:xfrm>
-            <a:off x="566928" y="475488"/>
-            <a:ext cx="11057839" cy="201168"/>
+            <a:off x="566928" y="429768"/>
+            <a:ext cx="11057839" cy="182880"/>
           </a:xfrm>
           <a:prstGeom prst="rect">
             <a:avLst/>
@@ -7445,8 +7445,8 @@
         </p:nvSpPr>
         <p:spPr>
           <a:xfrm>
-            <a:off x="566928" y="475488"/>
-            <a:ext cx="11057839" cy="201168"/>
+            <a:off x="566928" y="429768"/>
+            <a:ext cx="11057839" cy="182880"/>
           </a:xfrm>
           <a:prstGeom prst="rect">
             <a:avLst/>
@@ -7902,8 +7902,8 @@
         </p:nvSpPr>
         <p:spPr>
           <a:xfrm>
-            <a:off x="566928" y="475488"/>
-            <a:ext cx="11057839" cy="201168"/>
+            <a:off x="566928" y="429768"/>
+            <a:ext cx="11057839" cy="182880"/>
           </a:xfrm>
           <a:prstGeom prst="rect">
             <a:avLst/>
@@ -8375,8 +8375,8 @@
         </p:nvSpPr>
         <p:spPr>
           <a:xfrm>
-            <a:off x="566928" y="475488"/>
-            <a:ext cx="11057839" cy="201168"/>
+            <a:off x="566928" y="429768"/>
+            <a:ext cx="11057839" cy="182880"/>
           </a:xfrm>
           <a:prstGeom prst="rect">
             <a:avLst/>
@@ -8848,8 +8848,8 @@
         </p:nvSpPr>
         <p:spPr>
           <a:xfrm>
-            <a:off x="566928" y="475488"/>
-            <a:ext cx="11057839" cy="201168"/>
+            <a:off x="566928" y="429768"/>
+            <a:ext cx="11057839" cy="182880"/>
           </a:xfrm>
           <a:prstGeom prst="rect">
             <a:avLst/>
@@ -9875,8 +9875,8 @@
         </p:nvSpPr>
         <p:spPr>
           <a:xfrm>
-            <a:off x="566928" y="475488"/>
-            <a:ext cx="11057839" cy="201168"/>
+            <a:off x="566928" y="429768"/>
+            <a:ext cx="11057839" cy="182880"/>
           </a:xfrm>
           <a:prstGeom prst="rect">
             <a:avLst/>
